--- a/PPT/AI_Healthcare_Analyst_Agent_FinalPresentation.pptx
+++ b/PPT/AI_Healthcare_Analyst_Agent_FinalPresentation.pptx
@@ -216,7 +216,7 @@
           <a:p>
             <a:fld id="{D75813B3-6425-4A6D-806E-021B84DD5758}" type="datetimeFigureOut">
               <a:rPr lang="en-IN" smtClean="0"/>
-              <a:t>16-08-2026</a:t>
+              <a:t>17-08-2026</a:t>
             </a:fld>
             <a:endParaRPr lang="en-IN"/>
           </a:p>
@@ -10489,22 +10489,16 @@
               <a:buNone/>
             </a:pPr>
             <a:r>
-              <a:rPr lang="en-US" dirty="0">
-                <a:solidFill>
-                  <a:srgbClr val="0070C0"/>
-                </a:solidFill>
-                <a:latin typeface="Calibri" panose="020F0502020204030204" pitchFamily="34" charset="0"/>
-                <a:ea typeface="Calibri" panose="020F0502020204030204" pitchFamily="34" charset="0"/>
-                <a:cs typeface="Calibri" panose="020F0502020204030204" pitchFamily="34" charset="0"/>
-                <a:hlinkClick r:id="rId2">
-                  <a:extLst>
-                    <a:ext uri="{A12FA001-AC4F-418D-AE19-62706E023703}">
-                      <ahyp:hlinkClr xmlns:ahyp="http://schemas.microsoft.com/office/drawing/2018/hyperlinkcolor" val="tx"/>
-                    </a:ext>
-                  </a:extLst>
-                </a:hlinkClick>
+              <a:rPr lang="en-IN" dirty="0">
+                <a:hlinkClick r:id="rId2"/>
               </a:rPr>
-              <a:t>AI Business Analyst Agent Form</a:t>
+              <a:t>AI Healthcare Analytics · </a:t>
+            </a:r>
+            <a:r>
+              <a:rPr lang="en-IN" dirty="0" err="1">
+                <a:hlinkClick r:id="rId2"/>
+              </a:rPr>
+              <a:t>Streamlit</a:t>
             </a:r>
             <a:endParaRPr lang="en-IN" dirty="0">
               <a:solidFill>
@@ -10538,22 +10532,16 @@
               <a:buNone/>
             </a:pPr>
             <a:r>
-              <a:rPr lang="en-US" dirty="0">
-                <a:solidFill>
-                  <a:srgbClr val="0070C0"/>
-                </a:solidFill>
-                <a:latin typeface="Calibri" panose="020F0502020204030204" pitchFamily="34" charset="0"/>
-                <a:ea typeface="Calibri" panose="020F0502020204030204" pitchFamily="34" charset="0"/>
-                <a:cs typeface="Calibri" panose="020F0502020204030204" pitchFamily="34" charset="0"/>
-                <a:hlinkClick r:id="rId3">
-                  <a:extLst>
-                    <a:ext uri="{A12FA001-AC4F-418D-AE19-62706E023703}">
-                      <ahyp:hlinkClr xmlns:ahyp="http://schemas.microsoft.com/office/drawing/2018/hyperlinkcolor" val="tx"/>
-                    </a:ext>
-                  </a:extLst>
-                </a:hlinkClick>
+              <a:rPr lang="en-IN" dirty="0" err="1">
+                <a:hlinkClick r:id="rId3"/>
               </a:rPr>
-              <a:t>AI Business Analyst Agent Github Repository</a:t>
+              <a:t>Github</a:t>
+            </a:r>
+            <a:r>
+              <a:rPr lang="en-IN" dirty="0">
+                <a:hlinkClick r:id="rId3"/>
+              </a:rPr>
+              <a:t> Link</a:t>
             </a:r>
             <a:endParaRPr lang="en-IN" dirty="0">
               <a:solidFill>
@@ -10591,55 +10579,6 @@
                 <a:hlinkClick r:id="rId4"/>
               </a:rPr>
               <a:t>Healthcare AI Query Log - Google Sheets</a:t>
-            </a:r>
-            <a:endParaRPr lang="en-IN" dirty="0">
-              <a:solidFill>
-                <a:srgbClr val="0070C0"/>
-              </a:solidFill>
-              <a:latin typeface="Calibri" panose="020F0502020204030204" pitchFamily="34" charset="0"/>
-              <a:ea typeface="Calibri" panose="020F0502020204030204" pitchFamily="34" charset="0"/>
-              <a:cs typeface="Calibri" panose="020F0502020204030204" pitchFamily="34" charset="0"/>
-            </a:endParaRPr>
-          </a:p>
-          <a:p>
-            <a:pPr>
-              <a:lnSpc>
-                <a:spcPct val="150000"/>
-              </a:lnSpc>
-              <a:buFont typeface="Wingdings" panose="05000000000000000000" pitchFamily="2" charset="2"/>
-              <a:buChar char="Ø"/>
-            </a:pPr>
-            <a:r>
-              <a:rPr lang="en-IN" sz="1700" dirty="0">
-                <a:ea typeface="Calibri" panose="020F0502020204030204" pitchFamily="34" charset="0"/>
-              </a:rPr>
-              <a:t>Executive PPT Template</a:t>
-            </a:r>
-          </a:p>
-          <a:p>
-            <a:pPr marL="812780" lvl="1" indent="0">
-              <a:lnSpc>
-                <a:spcPct val="150000"/>
-              </a:lnSpc>
-              <a:buNone/>
-            </a:pPr>
-            <a:r>
-              <a:rPr lang="en-IN" dirty="0">
-                <a:solidFill>
-                  <a:srgbClr val="0070C0"/>
-                </a:solidFill>
-                <a:latin typeface="Calibri" panose="020F0502020204030204" pitchFamily="34" charset="0"/>
-                <a:ea typeface="Calibri" panose="020F0502020204030204" pitchFamily="34" charset="0"/>
-                <a:cs typeface="Calibri" panose="020F0502020204030204" pitchFamily="34" charset="0"/>
-                <a:hlinkClick r:id="rId5">
-                  <a:extLst>
-                    <a:ext uri="{A12FA001-AC4F-418D-AE19-62706E023703}">
-                      <ahyp:hlinkClr xmlns:ahyp="http://schemas.microsoft.com/office/drawing/2018/hyperlinkcolor" val="tx"/>
-                    </a:ext>
-                  </a:extLst>
-                </a:hlinkClick>
-              </a:rPr>
-              <a:t>Powerpoint Template</a:t>
             </a:r>
             <a:endParaRPr lang="en-IN" dirty="0">
               <a:solidFill>

--- a/PPT/AI_Healthcare_Analyst_Agent_FinalPresentation.pptx
+++ b/PPT/AI_Healthcare_Analyst_Agent_FinalPresentation.pptx
@@ -10495,7 +10495,7 @@
               <a:t>AI Healthcare Analytics · </a:t>
             </a:r>
             <a:r>
-              <a:rPr lang="en-IN" dirty="0" err="1">
+              <a:rPr lang="en-IN">
                 <a:hlinkClick r:id="rId2"/>
               </a:rPr>
               <a:t>Streamlit</a:t>

--- a/PPT/AI_Healthcare_Analyst_Agent_FinalPresentation.pptx
+++ b/PPT/AI_Healthcare_Analyst_Agent_FinalPresentation.pptx
@@ -216,7 +216,7 @@
           <a:p>
             <a:fld id="{D75813B3-6425-4A6D-806E-021B84DD5758}" type="datetimeFigureOut">
               <a:rPr lang="en-IN" smtClean="0"/>
-              <a:t>17-08-2026</a:t>
+              <a:t>19-08-2026</a:t>
             </a:fld>
             <a:endParaRPr lang="en-IN"/>
           </a:p>
@@ -6442,7 +6442,7 @@
             <a:pPr algn="ctr"/>
             <a:r>
               <a:rPr lang="en-IN" sz="4000" dirty="0"/>
-              <a:t>HEALTHCARE ANALYTICS &amp; KPI FRAMEWORK</a:t>
+              <a:t>AI-POWERED ANALYSIS &amp; RECOMMENDATIONS</a:t>
             </a:r>
             <a:endParaRPr lang="en-IN" sz="3600" dirty="0">
               <a:latin typeface="+mj-lt"/>
@@ -6521,62 +6521,20 @@
             </a:lvl1pPr>
           </a:lstStyle>
           <a:p>
+            <a:pPr algn="ctr"/>
             <a:r>
               <a:rPr lang="en-IN" dirty="0"/>
-              <a:t>Provider Metrics:-</a:t>
-            </a:r>
-          </a:p>
-          <a:p>
-            <a:endParaRPr lang="en-IN" dirty="0"/>
-          </a:p>
-          <a:p>
-            <a:pPr marL="285750" indent="-285750">
-              <a:buFont typeface="Arial" panose="020B0604020202020204" pitchFamily="34" charset="0"/>
-              <a:buChar char="•"/>
-            </a:pPr>
+              <a:t>Natural-Language Understanding:</a:t>
+            </a:r>
+          </a:p>
+          <a:p>
+            <a:pPr algn="ctr"/>
+            <a:br>
+              <a:rPr lang="en-IN" dirty="0"/>
+            </a:br>
             <a:r>
               <a:rPr lang="en-IN" b="0" dirty="0"/>
-              <a:t>Total Providers </a:t>
-            </a:r>
-          </a:p>
-          <a:p>
-            <a:pPr marL="285750" indent="-285750">
-              <a:buFont typeface="Arial" panose="020B0604020202020204" pitchFamily="34" charset="0"/>
-              <a:buChar char="•"/>
-            </a:pPr>
-            <a:r>
-              <a:rPr lang="en-IN" b="0" dirty="0"/>
-              <a:t>Providers by Specialty </a:t>
-            </a:r>
-          </a:p>
-          <a:p>
-            <a:pPr marL="285750" indent="-285750">
-              <a:buFont typeface="Arial" panose="020B0604020202020204" pitchFamily="34" charset="0"/>
-              <a:buChar char="•"/>
-            </a:pPr>
-            <a:r>
-              <a:rPr lang="en-IN" b="0" dirty="0"/>
-              <a:t>Provider Encounter Volume </a:t>
-            </a:r>
-          </a:p>
-          <a:p>
-            <a:pPr marL="285750" indent="-285750">
-              <a:buFont typeface="Arial" panose="020B0604020202020204" pitchFamily="34" charset="0"/>
-              <a:buChar char="•"/>
-            </a:pPr>
-            <a:r>
-              <a:rPr lang="en-IN" b="0" dirty="0"/>
-              <a:t>Average Encounter Duration</a:t>
-            </a:r>
-          </a:p>
-          <a:p>
-            <a:pPr marL="285750" indent="-285750">
-              <a:buFont typeface="Arial" panose="020B0604020202020204" pitchFamily="34" charset="0"/>
-              <a:buChar char="•"/>
-            </a:pPr>
-            <a:r>
-              <a:rPr lang="en-IN" b="0" dirty="0"/>
-              <a:t>Provider Efficiency</a:t>
+              <a:t>Converts healthcare business questions into analytical requests without requiring users to write SQL.</a:t>
             </a:r>
           </a:p>
         </p:txBody>
@@ -6596,7 +6554,7 @@
         <p:spPr>
           <a:xfrm>
             <a:off x="8216900" y="1355814"/>
-            <a:ext cx="3566160" cy="1600438"/>
+            <a:ext cx="3566160" cy="1169551"/>
           </a:xfrm>
           <a:prstGeom prst="rect">
             <a:avLst/>
@@ -6614,68 +6572,24 @@
           </a:bodyPr>
           <a:lstStyle/>
           <a:p>
-            <a:pPr>
+            <a:pPr algn="ctr">
               <a:buNone/>
             </a:pPr>
             <a:r>
               <a:rPr lang="en-IN" sz="1400" b="1" dirty="0"/>
-              <a:t>Encounter Metrics:-</a:t>
-            </a:r>
-          </a:p>
-          <a:p>
-            <a:pPr>
+              <a:t>Context-Aware Analysis:</a:t>
+            </a:r>
+          </a:p>
+          <a:p>
+            <a:pPr algn="ctr">
               <a:buNone/>
             </a:pPr>
-            <a:endParaRPr lang="en-IN" sz="1400" dirty="0"/>
-          </a:p>
-          <a:p>
-            <a:pPr marL="342900" lvl="0" indent="-342900">
-              <a:buFont typeface="Arial" panose="020B0604020202020204" pitchFamily="34" charset="0"/>
-              <a:buChar char="•"/>
-            </a:pPr>
-            <a:r>
+            <a:br>
               <a:rPr lang="en-IN" sz="1400" dirty="0"/>
-              <a:t>Total Encounters </a:t>
-            </a:r>
-          </a:p>
-          <a:p>
-            <a:pPr marL="342900" lvl="0" indent="-342900">
-              <a:buFont typeface="Arial" panose="020B0604020202020204" pitchFamily="34" charset="0"/>
-              <a:buChar char="•"/>
-            </a:pPr>
+            </a:br>
             <a:r>
               <a:rPr lang="en-IN" sz="1400" dirty="0"/>
-              <a:t>Encounters by Encounter Type </a:t>
-            </a:r>
-          </a:p>
-          <a:p>
-            <a:pPr marL="342900" lvl="0" indent="-342900">
-              <a:buFont typeface="Arial" panose="020B0604020202020204" pitchFamily="34" charset="0"/>
-              <a:buChar char="•"/>
-            </a:pPr>
-            <a:r>
-              <a:rPr lang="en-IN" sz="1400" dirty="0"/>
-              <a:t>Average Encounter Cost </a:t>
-            </a:r>
-          </a:p>
-          <a:p>
-            <a:pPr marL="342900" lvl="0" indent="-342900">
-              <a:buFont typeface="Arial" panose="020B0604020202020204" pitchFamily="34" charset="0"/>
-              <a:buChar char="•"/>
-            </a:pPr>
-            <a:r>
-              <a:rPr lang="en-IN" sz="1400" dirty="0"/>
-              <a:t>Total Claim Amount </a:t>
-            </a:r>
-          </a:p>
-          <a:p>
-            <a:pPr marL="342900" lvl="0" indent="-342900">
-              <a:buFont typeface="Arial" panose="020B0604020202020204" pitchFamily="34" charset="0"/>
-              <a:buChar char="•"/>
-            </a:pPr>
-            <a:r>
-              <a:rPr lang="en-IN" sz="1400" dirty="0"/>
-              <a:t>Claim Amount per Encounter</a:t>
+              <a:t>Uses conversational memory to retain recent interaction context for follow-up questions.</a:t>
             </a:r>
           </a:p>
         </p:txBody>
@@ -6721,52 +6635,20 @@
             </a:lvl1pPr>
           </a:lstStyle>
           <a:p>
+            <a:pPr algn="ctr"/>
             <a:r>
               <a:rPr lang="en-IN" dirty="0"/>
-              <a:t>Payer Metrics:-</a:t>
-            </a:r>
-          </a:p>
-          <a:p>
-            <a:endParaRPr lang="en-IN" dirty="0"/>
-          </a:p>
-          <a:p>
-            <a:pPr marL="285750" indent="-285750">
-              <a:buFont typeface="Arial" panose="020B0604020202020204" pitchFamily="34" charset="0"/>
-              <a:buChar char="•"/>
-            </a:pPr>
+              <a:t>Governed SQL Generation:</a:t>
+            </a:r>
+          </a:p>
+          <a:p>
+            <a:pPr algn="ctr"/>
+            <a:br>
+              <a:rPr lang="en-IN" dirty="0"/>
+            </a:br>
             <a:r>
               <a:rPr lang="en-IN" b="0" dirty="0"/>
-              <a:t>Total Payers </a:t>
-            </a:r>
-          </a:p>
-          <a:p>
-            <a:pPr marL="285750" indent="-285750">
-              <a:buFont typeface="Arial" panose="020B0604020202020204" pitchFamily="34" charset="0"/>
-              <a:buChar char="•"/>
-            </a:pPr>
-            <a:r>
-              <a:rPr lang="en-IN" b="0" dirty="0"/>
-              <a:t>Encounter Coverage by Payer </a:t>
-            </a:r>
-          </a:p>
-          <a:p>
-            <a:pPr marL="285750" indent="-285750">
-              <a:buFont typeface="Arial" panose="020B0604020202020204" pitchFamily="34" charset="0"/>
-              <a:buChar char="•"/>
-            </a:pPr>
-            <a:r>
-              <a:rPr lang="en-IN" b="0" dirty="0"/>
-              <a:t>Claim Amount by Payer </a:t>
-            </a:r>
-          </a:p>
-          <a:p>
-            <a:pPr marL="285750" indent="-285750">
-              <a:buFont typeface="Arial" panose="020B0604020202020204" pitchFamily="34" charset="0"/>
-              <a:buChar char="•"/>
-            </a:pPr>
-            <a:r>
-              <a:rPr lang="en-IN" b="0" dirty="0"/>
-              <a:t>Payer Contribution %</a:t>
+              <a:t>Generates read-only SQL and routes it through the Healthcare SQL Tool and validation layer before Snowflake execution.</a:t>
             </a:r>
           </a:p>
         </p:txBody>
@@ -6786,7 +6668,7 @@
         <p:spPr>
           <a:xfrm>
             <a:off x="8216900" y="3417917"/>
-            <a:ext cx="3566160" cy="1384995"/>
+            <a:ext cx="3566160" cy="1169551"/>
           </a:xfrm>
           <a:prstGeom prst="rect">
             <a:avLst/>
@@ -6812,52 +6694,20 @@
             </a:lvl1pPr>
           </a:lstStyle>
           <a:p>
+            <a:pPr algn="ctr"/>
             <a:r>
               <a:rPr lang="en-IN" dirty="0"/>
-              <a:t>Operational Metrics:-</a:t>
-            </a:r>
-          </a:p>
-          <a:p>
-            <a:endParaRPr lang="en-IN" dirty="0"/>
-          </a:p>
-          <a:p>
-            <a:pPr marL="285750" indent="-285750">
-              <a:buFont typeface="Arial" panose="020B0604020202020204" pitchFamily="34" charset="0"/>
-              <a:buChar char="•"/>
-            </a:pPr>
+              <a:t>Business Insight Generation:</a:t>
+            </a:r>
+          </a:p>
+          <a:p>
+            <a:pPr algn="ctr"/>
+            <a:br>
+              <a:rPr lang="en-IN" dirty="0"/>
+            </a:br>
             <a:r>
               <a:rPr lang="en-IN" b="0" dirty="0"/>
-              <a:t>Patient-to-Provider Activity </a:t>
-            </a:r>
-          </a:p>
-          <a:p>
-            <a:pPr marL="285750" indent="-285750">
-              <a:buFont typeface="Arial" panose="020B0604020202020204" pitchFamily="34" charset="0"/>
-              <a:buChar char="•"/>
-            </a:pPr>
-            <a:r>
-              <a:rPr lang="en-IN" b="0" dirty="0"/>
-              <a:t>Organizations with Active Encounters </a:t>
-            </a:r>
-          </a:p>
-          <a:p>
-            <a:pPr marL="285750" indent="-285750">
-              <a:buFont typeface="Arial" panose="020B0604020202020204" pitchFamily="34" charset="0"/>
-              <a:buChar char="•"/>
-            </a:pPr>
-            <a:r>
-              <a:rPr lang="en-IN" b="0" dirty="0"/>
-              <a:t>Procedure Volume </a:t>
-            </a:r>
-          </a:p>
-          <a:p>
-            <a:pPr marL="285750" indent="-285750">
-              <a:buFont typeface="Arial" panose="020B0604020202020204" pitchFamily="34" charset="0"/>
-              <a:buChar char="•"/>
-            </a:pPr>
-            <a:r>
-              <a:rPr lang="en-IN" b="0" dirty="0"/>
-              <a:t>Condition / Diagnosis Distribution</a:t>
+              <a:t>Converts database results into concise explanations, structured tables, and visual insights.</a:t>
             </a:r>
           </a:p>
         </p:txBody>
@@ -7006,7 +6856,7 @@
         </p:nvSpPr>
         <p:spPr>
           <a:xfrm>
-            <a:off x="176530" y="5172055"/>
+            <a:off x="176530" y="5654846"/>
             <a:ext cx="11606530" cy="646331"/>
           </a:xfrm>
           <a:prstGeom prst="rect">
@@ -7023,8 +6873,58 @@
             <a:pPr algn="ctr"/>
             <a:r>
               <a:rPr lang="en-IN" b="1" dirty="0"/>
-              <a:t>The platform converts raw healthcare records into operational, financial, provider, and payer-level insights through natural-language analytics.</a:t>
-            </a:r>
+              <a:t>The assistant combines natural-language reasoning with governed data access to deliver business-ready healthcare insights</a:t>
+            </a:r>
+          </a:p>
+        </p:txBody>
+      </p:sp>
+      <p:sp>
+        <p:nvSpPr>
+          <p:cNvPr id="5" name="TextBox 4">
+            <a:extLst>
+              <a:ext uri="{FF2B5EF4-FFF2-40B4-BE49-F238E27FC236}">
+                <a16:creationId xmlns:a16="http://schemas.microsoft.com/office/drawing/2014/main" id="{7CEF9F4B-EE4D-83C8-7345-DA191A1FA159}"/>
+              </a:ext>
+            </a:extLst>
+          </p:cNvPr>
+          <p:cNvSpPr txBox="1"/>
+          <p:nvPr/>
+        </p:nvSpPr>
+        <p:spPr>
+          <a:xfrm>
+            <a:off x="326390" y="5172244"/>
+            <a:ext cx="11456670" cy="369332"/>
+          </a:xfrm>
+          <a:prstGeom prst="rect">
+            <a:avLst/>
+          </a:prstGeom>
+          <a:noFill/>
+          <a:ln>
+            <a:solidFill>
+              <a:schemeClr val="tx1"/>
+            </a:solidFill>
+          </a:ln>
+        </p:spPr>
+        <p:txBody>
+          <a:bodyPr wrap="square">
+            <a:spAutoFit/>
+          </a:bodyPr>
+          <a:lstStyle/>
+          <a:p>
+            <a:pPr algn="ctr"/>
+            <a:r>
+              <a:rPr lang="en-IN" b="1" dirty="0"/>
+              <a:t>AI Guardrails:</a:t>
+            </a:r>
+            <a:r>
+              <a:rPr lang="en-IN" dirty="0"/>
+              <a:t> </a:t>
+            </a:r>
+            <a:r>
+              <a:rPr lang="en-IN" sz="1600" dirty="0"/>
+              <a:t>Curated healthcare schema • Read-only SQL • Sensitive-identifier protection • Domain-specific responses</a:t>
+            </a:r>
+            <a:endParaRPr lang="en-IN" dirty="0"/>
           </a:p>
         </p:txBody>
       </p:sp>
@@ -8908,8 +8808,8 @@
         </p:nvSpPr>
         <p:spPr>
           <a:xfrm>
-            <a:off x="381800" y="1952285"/>
-            <a:ext cx="11428400" cy="1256000"/>
+            <a:off x="381800" y="2370380"/>
+            <a:ext cx="11428400" cy="2117240"/>
           </a:xfrm>
         </p:spPr>
         <p:txBody>
@@ -8919,32 +8819,119 @@
           <a:lstStyle/>
           <a:p>
             <a:r>
-              <a:rPr lang="en-US" sz="4400" dirty="0">
+              <a:rPr lang="en-IN" sz="4400" dirty="0">
+                <a:ln w="0"/>
                 <a:solidFill>
                   <a:schemeClr val="tx1"/>
                 </a:solidFill>
+                <a:effectLst>
+                  <a:outerShdw blurRad="38100" dist="19050" dir="2700000" algn="tl" rotWithShape="0">
+                    <a:schemeClr val="dk1">
+                      <a:alpha val="40000"/>
+                    </a:schemeClr>
+                  </a:outerShdw>
+                </a:effectLst>
               </a:rPr>
-              <a:t>AI Workflow</a:t>
+              <a:t>LIVE AI WORKFLOW DEMONSTRATION</a:t>
             </a:r>
             <a:br>
-              <a:rPr lang="en-US" sz="4400" dirty="0">
+              <a:rPr lang="en-IN" sz="4400" dirty="0">
+                <a:ln w="0"/>
                 <a:solidFill>
                   <a:schemeClr val="tx1"/>
                 </a:solidFill>
+                <a:effectLst>
+                  <a:outerShdw blurRad="38100" dist="19050" dir="2700000" algn="tl" rotWithShape="0">
+                    <a:schemeClr val="dk1">
+                      <a:alpha val="40000"/>
+                    </a:schemeClr>
+                  </a:outerShdw>
+                </a:effectLst>
               </a:rPr>
             </a:br>
             <a:r>
-              <a:rPr lang="en-US" sz="3100" b="0" dirty="0">
+              <a:rPr lang="en-IN" sz="2000" i="1" dirty="0">
+                <a:highlight>
+                  <a:srgbClr val="000000"/>
+                </a:highlight>
+              </a:rPr>
+              <a:t>From a natural-language healthcare question to a governed analytical insight</a:t>
+            </a:r>
+            <a:br>
+              <a:rPr lang="en-IN" sz="2000" i="1" dirty="0">
+                <a:highlight>
+                  <a:srgbClr val="000000"/>
+                </a:highlight>
+              </a:rPr>
+            </a:br>
+            <a:br>
+              <a:rPr lang="en-IN" sz="2000" i="1" dirty="0">
+                <a:highlight>
+                  <a:srgbClr val="000000"/>
+                </a:highlight>
+              </a:rPr>
+            </a:br>
+            <a:br>
+              <a:rPr lang="en-IN" sz="2000" i="1" dirty="0">
+                <a:highlight>
+                  <a:srgbClr val="000000"/>
+                </a:highlight>
+              </a:rPr>
+            </a:br>
+            <a:r>
+              <a:rPr lang="en-IN" sz="2400" dirty="0">
                 <a:solidFill>
                   <a:schemeClr val="tx1"/>
                 </a:solidFill>
+                <a:latin typeface="Calibri" panose="020F0502020204030204" pitchFamily="34" charset="0"/>
+                <a:ea typeface="Calibri" panose="020F0502020204030204" pitchFamily="34" charset="0"/>
+                <a:cs typeface="Calibri" panose="020F0502020204030204" pitchFamily="34" charset="0"/>
               </a:rPr>
-              <a:t>Demonstration of how the Agentic AI Work</a:t>
-            </a:r>
-            <a:endParaRPr lang="en-IN" sz="4400" b="0" dirty="0">
+              <a:t>ASK → UNDERSTAND → VALIDATE → QUERY → INSIGHT</a:t>
+            </a:r>
+            <a:br>
+              <a:rPr lang="en-IN" sz="2400" dirty="0">
+                <a:solidFill>
+                  <a:schemeClr val="tx1"/>
+                </a:solidFill>
+                <a:latin typeface="Calibri" panose="020F0502020204030204" pitchFamily="34" charset="0"/>
+                <a:ea typeface="Calibri" panose="020F0502020204030204" pitchFamily="34" charset="0"/>
+                <a:cs typeface="Calibri" panose="020F0502020204030204" pitchFamily="34" charset="0"/>
+              </a:rPr>
+            </a:br>
+            <a:r>
+              <a:rPr lang="en-IN" sz="2400" dirty="0">
+                <a:solidFill>
+                  <a:schemeClr val="tx1"/>
+                </a:solidFill>
+                <a:latin typeface="Calibri" panose="020F0502020204030204" pitchFamily="34" charset="0"/>
+                <a:ea typeface="Calibri" panose="020F0502020204030204" pitchFamily="34" charset="0"/>
+                <a:cs typeface="Calibri" panose="020F0502020204030204" pitchFamily="34" charset="0"/>
+              </a:rPr>
+              <a:t>Streamlit → n8n AI Agent → Gemini + Memory → SQL Governance → Snowflake</a:t>
+            </a:r>
+            <a:br>
+              <a:rPr lang="en-IN" sz="2200" dirty="0">
+                <a:highlight>
+                  <a:srgbClr val="000000"/>
+                </a:highlight>
+              </a:rPr>
+            </a:br>
+            <a:endParaRPr lang="en-IN" sz="2200" dirty="0">
+              <a:ln w="0"/>
               <a:solidFill>
                 <a:schemeClr val="tx1"/>
               </a:solidFill>
+              <a:effectLst>
+                <a:outerShdw blurRad="38100" dist="19050" dir="2700000" algn="tl" rotWithShape="0">
+                  <a:schemeClr val="dk1">
+                    <a:alpha val="40000"/>
+                  </a:schemeClr>
+                </a:outerShdw>
+              </a:effectLst>
+              <a:highlight>
+                <a:srgbClr val="000000"/>
+              </a:highlight>
             </a:endParaRPr>
           </a:p>
         </p:txBody>
@@ -9143,15 +9130,7 @@
             <a:pPr algn="ctr"/>
             <a:r>
               <a:rPr lang="en-US" b="1" dirty="0"/>
-              <a:t>or you can type your question below in the typing bar </a:t>
-            </a:r>
-            <a:r>
-              <a:rPr lang="en-US" b="1" dirty="0" err="1"/>
-              <a:t>bar</a:t>
-            </a:r>
-            <a:r>
-              <a:rPr lang="en-US" b="1" dirty="0"/>
-              <a:t> for the answer</a:t>
+              <a:t>or you can type your question below in the typing bar for the answer</a:t>
             </a:r>
             <a:endParaRPr lang="en-IN" b="1" dirty="0"/>
           </a:p>
@@ -10126,14 +10105,20 @@
         </p:nvSpPr>
         <p:spPr>
           <a:xfrm>
-            <a:off x="654559" y="0"/>
-            <a:ext cx="10882882" cy="1137600"/>
+            <a:off x="0" y="0"/>
+            <a:ext cx="12192000" cy="924791"/>
           </a:xfrm>
+          <a:ln>
+            <a:solidFill>
+              <a:schemeClr val="tx1"/>
+            </a:solidFill>
+          </a:ln>
         </p:spPr>
         <p:txBody>
           <a:bodyPr/>
           <a:lstStyle/>
           <a:p>
+            <a:pPr algn="ctr"/>
             <a:r>
               <a:rPr lang="en-IN" sz="3600" dirty="0"/>
               <a:t>LIVE DEMONSTRATION &amp; PROJECT RESOURCES</a:t>
@@ -10187,8 +10172,8 @@
         </p:nvSpPr>
         <p:spPr>
           <a:xfrm>
-            <a:off x="654559" y="1372838"/>
-            <a:ext cx="5648553" cy="3864564"/>
+            <a:off x="0" y="1734471"/>
+            <a:ext cx="7117906" cy="3864564"/>
           </a:xfrm>
           <a:prstGeom prst="rect">
             <a:avLst/>
@@ -10454,8 +10439,8 @@
               <a:buNone/>
             </a:pPr>
             <a:r>
-              <a:rPr lang="en-IN" sz="1800" b="1" dirty="0"/>
-              <a:t>Project Resources</a:t>
+              <a:rPr lang="en-IN" sz="3200" b="1" dirty="0"/>
+              <a:t>Project Resources :</a:t>
             </a:r>
           </a:p>
           <a:p>
@@ -10475,30 +10460,18 @@
               <a:buChar char="Ø"/>
             </a:pPr>
             <a:r>
-              <a:rPr lang="en-IN" sz="1700" dirty="0">
-                <a:ea typeface="Calibri" panose="020F0502020204030204" pitchFamily="34" charset="0"/>
-              </a:rPr>
-              <a:t>Web Form</a:t>
-            </a:r>
-          </a:p>
-          <a:p>
-            <a:pPr marL="812780" lvl="1" indent="0">
-              <a:lnSpc>
-                <a:spcPct val="150000"/>
-              </a:lnSpc>
-              <a:buNone/>
-            </a:pPr>
-            <a:r>
-              <a:rPr lang="en-IN" dirty="0">
+              <a:rPr lang="en-IN" sz="1600" b="1" dirty="0"/>
+              <a:t>Live AI Healthcare Analytics Assistant </a:t>
+            </a:r>
+            <a:r>
+              <a:rPr lang="en-IN" sz="1800" b="1" dirty="0"/>
+              <a:t>- </a:t>
+            </a:r>
+            <a:r>
+              <a:rPr lang="en-IN" sz="1200" b="1" dirty="0">
                 <a:hlinkClick r:id="rId2"/>
               </a:rPr>
-              <a:t>AI Healthcare Analytics · </a:t>
-            </a:r>
-            <a:r>
-              <a:rPr lang="en-IN">
-                <a:hlinkClick r:id="rId2"/>
-              </a:rPr>
-              <a:t>Streamlit</a:t>
+              <a:t>AI Healthcare Analytics - Streamlit</a:t>
             </a:r>
             <a:endParaRPr lang="en-IN" dirty="0">
               <a:solidFill>
@@ -10518,32 +10491,24 @@
               <a:buChar char="Ø"/>
             </a:pPr>
             <a:r>
-              <a:rPr lang="en-IN" sz="1700" dirty="0">
+              <a:rPr lang="en-IN" sz="1600" b="1" dirty="0">
                 <a:ea typeface="Calibri" panose="020F0502020204030204" pitchFamily="34" charset="0"/>
               </a:rPr>
-              <a:t>GitHub Repository</a:t>
-            </a:r>
-          </a:p>
-          <a:p>
-            <a:pPr marL="812780" lvl="1" indent="0">
-              <a:lnSpc>
-                <a:spcPct val="150000"/>
-              </a:lnSpc>
-              <a:buNone/>
-            </a:pPr>
-            <a:r>
-              <a:rPr lang="en-IN" dirty="0" err="1">
+              <a:t>GitHub Repository </a:t>
+            </a:r>
+            <a:r>
+              <a:rPr lang="en-IN" sz="1700" b="1" dirty="0">
+                <a:ea typeface="Calibri" panose="020F0502020204030204" pitchFamily="34" charset="0"/>
+              </a:rPr>
+              <a:t>- </a:t>
+            </a:r>
+            <a:r>
+              <a:rPr lang="en-IN" sz="1400" b="1" dirty="0">
                 <a:hlinkClick r:id="rId3"/>
               </a:rPr>
-              <a:t>Github</a:t>
-            </a:r>
-            <a:r>
-              <a:rPr lang="en-IN" dirty="0">
-                <a:hlinkClick r:id="rId3"/>
-              </a:rPr>
-              <a:t> Link</a:t>
-            </a:r>
-            <a:endParaRPr lang="en-IN" dirty="0">
+              <a:t>GitHub Link</a:t>
+            </a:r>
+            <a:endParaRPr lang="en-IN" sz="1200" dirty="0">
               <a:solidFill>
                 <a:srgbClr val="0070C0"/>
               </a:solidFill>
@@ -10561,26 +10526,74 @@
               <a:buChar char="Ø"/>
             </a:pPr>
             <a:r>
-              <a:rPr lang="en-IN" sz="1700" dirty="0">
+              <a:rPr lang="en-IN" sz="1600" b="1" dirty="0">
                 <a:ea typeface="Calibri" panose="020F0502020204030204" pitchFamily="34" charset="0"/>
               </a:rPr>
-              <a:t>KPI Repository (Google Sheets)</a:t>
-            </a:r>
-          </a:p>
-          <a:p>
-            <a:pPr marL="812780" lvl="1" indent="0">
-              <a:lnSpc>
-                <a:spcPct val="150000"/>
-              </a:lnSpc>
-              <a:buNone/>
-            </a:pPr>
-            <a:r>
-              <a:rPr lang="en-IN" dirty="0">
+              <a:t>KPI Repository (Google Sheets) </a:t>
+            </a:r>
+            <a:r>
+              <a:rPr lang="en-IN" sz="1700" b="1" dirty="0">
+                <a:ea typeface="Calibri" panose="020F0502020204030204" pitchFamily="34" charset="0"/>
+              </a:rPr>
+              <a:t>- </a:t>
+            </a:r>
+            <a:r>
+              <a:rPr lang="en-IN" sz="1200" b="1" dirty="0">
                 <a:hlinkClick r:id="rId4"/>
               </a:rPr>
               <a:t>Healthcare AI Query Log - Google Sheets</a:t>
             </a:r>
-            <a:endParaRPr lang="en-IN" dirty="0">
+            <a:endParaRPr lang="en-IN" sz="1600" b="1" dirty="0">
+              <a:solidFill>
+                <a:srgbClr val="0070C0"/>
+              </a:solidFill>
+              <a:latin typeface="Calibri" panose="020F0502020204030204" pitchFamily="34" charset="0"/>
+              <a:ea typeface="Calibri" panose="020F0502020204030204" pitchFamily="34" charset="0"/>
+              <a:cs typeface="Calibri" panose="020F0502020204030204" pitchFamily="34" charset="0"/>
+            </a:endParaRPr>
+          </a:p>
+          <a:p>
+            <a:pPr>
+              <a:lnSpc>
+                <a:spcPct val="150000"/>
+              </a:lnSpc>
+              <a:buFont typeface="Wingdings" panose="05000000000000000000" pitchFamily="2" charset="2"/>
+              <a:buChar char="Ø"/>
+            </a:pPr>
+            <a:r>
+              <a:rPr lang="en-IN" sz="1600" b="1" dirty="0"/>
+              <a:t>n8n Agentic Workflows </a:t>
+            </a:r>
+            <a:r>
+              <a:rPr lang="en-IN" b="1" dirty="0"/>
+              <a:t>- </a:t>
+            </a:r>
+            <a:r>
+              <a:rPr lang="en-IN" sz="1200" b="1" u="sng" dirty="0"/>
+              <a:t>AI Agent + Healthcare SQL Tool</a:t>
+            </a:r>
+          </a:p>
+          <a:p>
+            <a:pPr>
+              <a:lnSpc>
+                <a:spcPct val="150000"/>
+              </a:lnSpc>
+              <a:buFont typeface="Wingdings" panose="05000000000000000000" pitchFamily="2" charset="2"/>
+              <a:buChar char="Ø"/>
+            </a:pPr>
+            <a:r>
+              <a:rPr lang="en-IN" sz="1600" b="1" dirty="0"/>
+              <a:t>Snowflake SQL &amp; Data Scripts </a:t>
+            </a:r>
+            <a:r>
+              <a:rPr lang="en-IN" b="1" dirty="0"/>
+              <a:t>- </a:t>
+            </a:r>
+            <a:r>
+              <a:rPr lang="en-IN" sz="1200" b="1" u="sng" dirty="0"/>
+              <a:t>Healthcare data preparation, cleaning &amp; analytics scripts</a:t>
+            </a:r>
+            <a:endParaRPr lang="en-IN" b="1" u="sng" dirty="0">
               <a:solidFill>
                 <a:srgbClr val="0070C0"/>
               </a:solidFill>
@@ -10605,13 +10618,18 @@
         </p:nvSpPr>
         <p:spPr>
           <a:xfrm>
-            <a:off x="844647" y="5485162"/>
-            <a:ext cx="10916929" cy="615553"/>
+            <a:off x="-93518" y="5837464"/>
+            <a:ext cx="12285518" cy="338554"/>
           </a:xfrm>
           <a:prstGeom prst="rect">
             <a:avLst/>
           </a:prstGeom>
           <a:noFill/>
+          <a:ln>
+            <a:solidFill>
+              <a:schemeClr val="tx1"/>
+            </a:solidFill>
+          </a:ln>
         </p:spPr>
         <p:txBody>
           <a:bodyPr wrap="square">
@@ -10619,19 +10637,11 @@
           </a:bodyPr>
           <a:lstStyle/>
           <a:p>
-            <a:r>
-              <a:rPr lang="en-US" sz="1700" b="1" dirty="0">
-                <a:latin typeface="Calibri" panose="020F0502020204030204" pitchFamily="34" charset="0"/>
-                <a:ea typeface="Calibri" panose="020F0502020204030204" pitchFamily="34" charset="0"/>
-                <a:cs typeface="Calibri" panose="020F0502020204030204" pitchFamily="34" charset="0"/>
-              </a:rPr>
-              <a:t>All outputs shown in this project are generated automatically through the deployed n8n workflow and can be accessed using the provided project resources.</a:t>
-            </a:r>
-            <a:endParaRPr lang="en-IN" sz="1700" dirty="0">
-              <a:latin typeface="Calibri" panose="020F0502020204030204" pitchFamily="34" charset="0"/>
-              <a:ea typeface="Calibri" panose="020F0502020204030204" pitchFamily="34" charset="0"/>
-              <a:cs typeface="Calibri" panose="020F0502020204030204" pitchFamily="34" charset="0"/>
-            </a:endParaRPr>
+            <a:pPr algn="ctr"/>
+            <a:r>
+              <a:rPr lang="en-IN" sz="1600" b="1" dirty="0"/>
+              <a:t>Explore the live application and project repository to review the complete agentic healthcare analytics solution.</a:t>
+            </a:r>
           </a:p>
         </p:txBody>
       </p:sp>
@@ -15827,7 +15837,7 @@
         </p:spPr>
         <p:txBody>
           <a:bodyPr>
-            <a:normAutofit fontScale="92500" lnSpcReduction="10000"/>
+            <a:normAutofit lnSpcReduction="10000"/>
           </a:bodyPr>
           <a:lstStyle/>
           <a:p>
@@ -15849,99 +15859,98 @@
               <a:rPr lang="en-IN" dirty="0"/>
             </a:br>
             <a:r>
+              <a:rPr lang="en-IN" sz="1300" dirty="0"/>
+              <a:t>Patient demographics and healthcare information</a:t>
+            </a:r>
+            <a:br>
+              <a:rPr lang="en-IN" sz="1300" dirty="0"/>
+            </a:br>
+            <a:r>
+              <a:rPr lang="en-IN" sz="1300" dirty="0"/>
+              <a:t>Patient ID • Birth Date • Gender • Healthcare Expenses • Coverage</a:t>
+            </a:r>
+          </a:p>
+          <a:p>
+            <a:pPr marL="203195" indent="0">
+              <a:buNone/>
+            </a:pPr>
+            <a:r>
+              <a:rPr lang="en-IN" sz="1300" dirty="0"/>
+              <a:t> </a:t>
+            </a:r>
+          </a:p>
+          <a:p>
+            <a:r>
+              <a:rPr lang="en-IN" sz="1800" b="1" dirty="0"/>
+              <a:t>Encounters</a:t>
+            </a:r>
+            <a:br>
+              <a:rPr lang="en-IN" dirty="0"/>
+            </a:br>
+            <a:r>
+              <a:rPr lang="en-IN" sz="1300" dirty="0"/>
+              <a:t>Central operational transaction table</a:t>
+            </a:r>
+            <a:br>
+              <a:rPr lang="en-IN" sz="1300" dirty="0"/>
+            </a:br>
+            <a:r>
+              <a:rPr lang="en-IN" sz="1300" dirty="0"/>
+              <a:t>Encounter ID • Patient ID • Provider ID • Payer ID • Encounter Type • Claim Amount</a:t>
+            </a:r>
+          </a:p>
+          <a:p>
+            <a:pPr marL="203195" indent="0">
+              <a:buNone/>
+            </a:pPr>
+            <a:endParaRPr lang="en-IN" sz="1400" dirty="0"/>
+          </a:p>
+          <a:p>
+            <a:r>
+              <a:rPr lang="en-IN" sz="1800" b="1" dirty="0"/>
+              <a:t>Providers</a:t>
+            </a:r>
+            <a:br>
+              <a:rPr lang="en-IN" dirty="0"/>
+            </a:br>
+            <a:r>
               <a:rPr lang="en-IN" sz="1400" dirty="0"/>
-              <a:t>Patient demographics and identity information</a:t>
+              <a:t>Provider and specialty information</a:t>
             </a:r>
             <a:br>
               <a:rPr lang="en-IN" sz="1400" dirty="0"/>
             </a:br>
             <a:r>
-              <a:rPr lang="en-IN" sz="1400" dirty="0"/>
-              <a:t>Patient ID • Birth Date • Gender • Demographic Attributes</a:t>
-            </a:r>
+              <a:rPr lang="en-IN" dirty="0"/>
+              <a:t>Provider ID • Provider Name • Specialty • City • State • Total Encounters</a:t>
+            </a:r>
+            <a:endParaRPr lang="en-IN" sz="1400" dirty="0"/>
           </a:p>
           <a:p>
             <a:pPr marL="203195" indent="0">
               <a:buNone/>
             </a:pPr>
-            <a:r>
-              <a:rPr lang="en-IN" sz="1400" dirty="0"/>
-              <a:t> </a:t>
-            </a:r>
-            <a:endParaRPr lang="en-IN" dirty="0"/>
+            <a:endParaRPr lang="en-IN" sz="1400" dirty="0"/>
           </a:p>
           <a:p>
             <a:r>
               <a:rPr lang="en-IN" sz="1800" b="1" dirty="0"/>
-              <a:t>Encounters</a:t>
+              <a:t>Payers</a:t>
             </a:r>
             <a:br>
               <a:rPr lang="en-IN" dirty="0"/>
             </a:br>
             <a:r>
               <a:rPr lang="en-IN" sz="1400" dirty="0"/>
-              <a:t>Healthcare visits and encounter-level activity</a:t>
+              <a:t>Payer and coverage information</a:t>
             </a:r>
             <a:br>
               <a:rPr lang="en-IN" sz="1400" dirty="0"/>
             </a:br>
             <a:r>
-              <a:rPr lang="en-IN" sz="1400" dirty="0"/>
-              <a:t>Encounter ID • Patient ID • Provider ID • Start/End DateTime • Encounter Class • Total Claim Amount </a:t>
-            </a:r>
-          </a:p>
-          <a:p>
-            <a:pPr marL="203195" indent="0">
-              <a:buNone/>
-            </a:pPr>
-            <a:endParaRPr lang="en-IN" sz="1400" dirty="0"/>
-          </a:p>
-          <a:p>
-            <a:r>
-              <a:rPr lang="en-IN" sz="1800" b="1" dirty="0"/>
-              <a:t>Providers</a:t>
-            </a:r>
-            <a:br>
               <a:rPr lang="en-IN" dirty="0"/>
-            </a:br>
-            <a:r>
-              <a:rPr lang="en-IN" sz="1400" dirty="0"/>
-              <a:t>Healthcare provider information</a:t>
-            </a:r>
-            <a:br>
-              <a:rPr lang="en-IN" sz="1400" dirty="0"/>
-            </a:br>
-            <a:r>
-              <a:rPr lang="en-IN" sz="1400" dirty="0"/>
-              <a:t>Provider ID • Name • Gender • Specialty • Organization </a:t>
-            </a:r>
-          </a:p>
-          <a:p>
-            <a:pPr marL="203195" indent="0">
-              <a:buNone/>
-            </a:pPr>
-            <a:endParaRPr lang="en-IN" sz="1400" dirty="0"/>
-          </a:p>
-          <a:p>
-            <a:r>
-              <a:rPr lang="en-IN" sz="1800" b="1" dirty="0"/>
-              <a:t>Payers</a:t>
-            </a:r>
-            <a:br>
-              <a:rPr lang="en-IN" dirty="0"/>
-            </a:br>
-            <a:r>
-              <a:rPr lang="en-IN" sz="1400" dirty="0"/>
-              <a:t>Insurance / coverage information</a:t>
-            </a:r>
-            <a:br>
-              <a:rPr lang="en-IN" sz="1400" dirty="0"/>
-            </a:br>
-            <a:r>
-              <a:rPr lang="en-IN" sz="1400" dirty="0"/>
-              <a:t>Payer ID • Payer Name • Payer Type • Coverage Details </a:t>
-            </a:r>
-            <a:endParaRPr lang="en-IN" dirty="0"/>
+              <a:t>Payer ID • Payer Name • Covered Encounters • Covered Amount • Revenue</a:t>
+            </a:r>
           </a:p>
           <a:p>
             <a:endParaRPr lang="en-IN" sz="1400" dirty="0"/>
@@ -16005,7 +16014,7 @@
         <p:spPr>
           <a:xfrm>
             <a:off x="6605044" y="2675183"/>
-            <a:ext cx="6017343" cy="2893293"/>
+            <a:ext cx="5621369" cy="3247236"/>
           </a:xfrm>
           <a:prstGeom prst="rect">
             <a:avLst/>
@@ -16030,15 +16039,15 @@
               <a:rPr lang="en-IN" sz="1867" dirty="0"/>
             </a:br>
             <a:r>
-              <a:rPr lang="en-IN" sz="1300" dirty="0"/>
-              <a:t>Healthcare organizations associated with providers</a:t>
+              <a:rPr lang="en-IN" sz="1250" dirty="0"/>
+              <a:t>Healthcare organization information</a:t>
             </a:r>
             <a:br>
-              <a:rPr lang="en-IN" sz="1300" dirty="0"/>
+              <a:rPr lang="en-IN" sz="1250" dirty="0"/>
             </a:br>
             <a:r>
-              <a:rPr lang="en-IN" sz="1300" dirty="0"/>
-              <a:t>Organization ID • Name • Address • City • State </a:t>
+              <a:rPr lang="en-IN" sz="1250" dirty="0"/>
+              <a:t>Organization ID • Organization Name • City • State • Revenue • Encounters</a:t>
             </a:r>
           </a:p>
           <a:p>
@@ -16057,15 +16066,15 @@
               <a:rPr lang="en-IN" sz="1867" dirty="0"/>
             </a:br>
             <a:r>
-              <a:rPr lang="en-IN" sz="1300" dirty="0"/>
-              <a:t>Clinical procedures performed during encounters</a:t>
+              <a:rPr lang="en-IN" sz="1250" dirty="0"/>
+              <a:t>Procedure-level healthcare activity</a:t>
             </a:r>
             <a:br>
-              <a:rPr lang="en-IN" sz="1300" dirty="0"/>
+              <a:rPr lang="en-IN" sz="1250" dirty="0"/>
             </a:br>
             <a:r>
-              <a:rPr lang="en-IN" sz="1300" dirty="0"/>
-              <a:t>Procedure ID • Patient/Encounter ID • Procedure Description • Cost </a:t>
+              <a:rPr lang="en-IN" sz="1250" dirty="0"/>
+              <a:t>Procedure Date • Patient ID • Encounter ID • Procedure Code • Procedure Cost</a:t>
             </a:r>
           </a:p>
           <a:p>
@@ -16084,15 +16093,15 @@
               <a:rPr lang="en-IN" sz="1867" dirty="0"/>
             </a:br>
             <a:r>
-              <a:rPr lang="en-IN" sz="1300" dirty="0"/>
-              <a:t>Diagnoses / medical conditions associated with patients and encounters</a:t>
+              <a:rPr lang="en-IN" sz="1250" dirty="0"/>
+              <a:t>Condition / diagnosis records</a:t>
             </a:r>
             <a:br>
-              <a:rPr lang="en-IN" sz="1300" dirty="0"/>
+              <a:rPr lang="en-IN" sz="1250" dirty="0"/>
             </a:br>
             <a:r>
-              <a:rPr lang="en-IN" sz="1300" dirty="0"/>
-              <a:t>Condition ID • Patient/Encounter ID • Condition Description </a:t>
+              <a:rPr lang="en-IN" sz="1250" dirty="0"/>
+              <a:t>Start Date • End Date • Patient ID • Encounter ID • Condition Code</a:t>
             </a:r>
           </a:p>
           <a:p>
